--- a/outputs/08/Sunum.pptx
+++ b/outputs/08/Sunum.pptx
@@ -3178,7 +3178,7 @@
                 </a:solidFill>
                 <a:latin typeface="Arial"/>
               </a:rPr>
-              <a:t>Ezine RES + batarya: inşaata hazır bir proje için durum tespiti ve sınırlı teklif öneriyoruz</a:t>
+              <a:t>Ezine RES + batarya: edinimi şimdilik rafa kaldırmayı ve tetikleyicileri izlemeyi öneriyoruz</a:t>
             </a:r>
           </a:p>
         </p:txBody>
@@ -3359,7 +3359,7 @@
             <a:avLst/>
           </a:prstGeom>
           <a:solidFill>
-            <a:srgbClr val="2A78D6"/>
+            <a:srgbClr val="EB6834"/>
           </a:solidFill>
           <a:ln>
             <a:noFill/>
@@ -3422,7 +3422,7 @@
                 </a:solidFill>
                 <a:latin typeface="Arial"/>
               </a:rPr>
-              <a:t>Talep edilen karar 1</a:t>
+              <a:t>Baz vaka beklenen NPV</a:t>
             </a:r>
           </a:p>
         </p:txBody>
@@ -3461,7 +3461,7 @@
                 </a:solidFill>
                 <a:latin typeface="Arial"/>
               </a:rPr>
-              <a:t>0,5 M$</a:t>
+              <a:t>−1,7 M$</a:t>
             </a:r>
           </a:p>
         </p:txBody>
@@ -3500,7 +3500,7 @@
                 </a:solidFill>
                 <a:latin typeface="Arial"/>
               </a:rPr>
-              <a:t>dar kapsamlı durum tespiti bütçesi</a:t>
+              <a:t>kâr olasılığı %42</a:t>
             </a:r>
           </a:p>
         </p:txBody>
@@ -3564,7 +3564,7 @@
             <a:avLst/>
           </a:prstGeom>
           <a:solidFill>
-            <a:srgbClr val="2A78D6"/>
+            <a:srgbClr val="8A8984"/>
           </a:solidFill>
           <a:ln>
             <a:noFill/>
@@ -3627,7 +3627,7 @@
                 </a:solidFill>
                 <a:latin typeface="Arial"/>
               </a:rPr>
-              <a:t>Talep edilen karar 2</a:t>
+              <a:t>Talep edilen karar</a:t>
             </a:r>
           </a:p>
         </p:txBody>
@@ -3666,7 +3666,7 @@
                 </a:solidFill>
                 <a:latin typeface="Arial"/>
               </a:rPr>
-              <a:t>≤ 1,5 M$</a:t>
+              <a:t>Rafa kaldır</a:t>
             </a:r>
           </a:p>
         </p:txBody>
@@ -3705,7 +3705,7 @@
                 </a:solidFill>
                 <a:latin typeface="Arial"/>
               </a:rPr>
-              <a:t>edinim primiyle sınırlı bağlayıcı olmayan teklif</a:t>
+              <a:t>durum tespiti bütçesi ve teklif yok</a:t>
             </a:r>
           </a:p>
         </p:txBody>
@@ -3769,7 +3769,7 @@
             <a:avLst/>
           </a:prstGeom>
           <a:solidFill>
-            <a:srgbClr val="EB6834"/>
+            <a:srgbClr val="2A78D6"/>
           </a:solidFill>
           <a:ln>
             <a:noFill/>
@@ -3832,7 +3832,7 @@
                 </a:solidFill>
                 <a:latin typeface="Arial"/>
               </a:rPr>
-              <a:t>Bu bir FID değil</a:t>
+              <a:t>Yeniden değerlendirme</a:t>
             </a:r>
           </a:p>
         </p:txBody>
@@ -3871,7 +3871,7 @@
                 </a:solidFill>
                 <a:latin typeface="Arial"/>
               </a:rPr>
-              <a:t>6 koşul</a:t>
+              <a:t>5 tetikleyici</a:t>
             </a:r>
           </a:p>
         </p:txBody>
@@ -3910,7 +3910,7 @@
                 </a:solidFill>
                 <a:latin typeface="Arial"/>
               </a:rPr>
-              <a:t>FID, durum tespiti sonrası ayrıca</a:t>
+              <a:t>YEKDEM endeksleme, fiyat, CAPEX, SFK, kesinti</a:t>
             </a:r>
           </a:p>
         </p:txBody>
@@ -4253,7 +4253,7 @@
                 </a:solidFill>
                 <a:latin typeface="Arial"/>
               </a:rPr>
-              <a:t>Karar dört kez değişti: önce iyimser SFK varsayımı, sonra kötümser sabit YEKDEM varsayımı düzeltildi</a:t>
+              <a:t>Karar beş kez değişti: iyimser SFK, kötümser sabit YEKDEM ve iyimser fiyat ortalaması varsayımları düzeltildi</a:t>
             </a:r>
           </a:p>
         </p:txBody>
@@ -4292,7 +4292,7 @@
                 </a:solidFill>
                 <a:latin typeface="Arial"/>
               </a:rPr>
-              <a:t>Her nokta o aşamadaki önerinin beklenen NPV'si. Son adım üç tutarlılık düzeltmesi: YEKDEM yıllık opsiyonu (+12,5), ortak batarya sürücüsü (+0,2), inşaata hazır takvim (+0,2).</a:t>
+              <a:t>Her nokta o aşamadaki önerinin beklenen NPV'si. Tutarlılık 2: YEKDEM yıllık opsiyonu, ortak batarya sürücüsü, inşaata hazır takvim. Nihai: 58 $/MWh medyan değil beklenen değer.</a:t>
             </a:r>
           </a:p>
         </p:txBody>
@@ -4495,7 +4495,7 @@
                 </a:solidFill>
                 <a:latin typeface="Arial"/>
               </a:rPr>
-              <a:t>Talep: 0,5 M$ durum tespiti ve ≤ 1,5 M$ primle bağlayıcı olmayan teklif; FID altı koşula bağlı</a:t>
+              <a:t>Talep: edinimi rafa kaldır; değeri pozitif gösteren fark fiyat ortalamasındaki bir ayar hatasıydı</a:t>
             </a:r>
           </a:p>
         </p:txBody>
@@ -4534,7 +4534,7 @@
                 </a:solidFill>
                 <a:latin typeface="Arial"/>
               </a:rPr>
-              <a:t>Durum tespiti kalemleri FID koşullarından; bütçe tavanı her kalemin bilgi değeri (EVPPI) toplamı: 1,04 M$.</a:t>
+              <a:t>Deterministik baz (−2,4 M$) ile Monte Carlo arasındaki fark bileşenlere ayrıldı. Çubuk: düzeltme sonrası; nokta: öncesi (58 = medyan).</a:t>
             </a:r>
           </a:p>
         </p:txBody>
@@ -4619,7 +4619,7 @@
       </p:sp>
       <p:pic>
         <p:nvPicPr>
-          <p:cNvPr id="7" name="Picture 6" descr="dd_bilgi_degeri_dar.png"/>
+          <p:cNvPr id="7" name="Picture 6" descr="kopru.png"/>
           <p:cNvPicPr>
             <a:picLocks noChangeAspect="1"/>
           </p:cNvPicPr>
@@ -4633,8 +4633,8 @@
         </p:blipFill>
         <p:spPr>
           <a:xfrm>
-            <a:off x="502919" y="2518767"/>
-            <a:ext cx="6766560" cy="3283504"/>
+            <a:off x="502920" y="2336057"/>
+            <a:ext cx="6766560" cy="3648924"/>
           </a:xfrm>
           <a:prstGeom prst="rect">
             <a:avLst/>
@@ -4675,7 +4675,7 @@
                 </a:solidFill>
                 <a:latin typeface="Arial"/>
               </a:rPr>
-              <a:t>FID koşulları</a:t>
+              <a:t>Durum tespiti bütçesi ve teklif yok</a:t>
             </a:r>
           </a:p>
           <a:p>
@@ -4691,7 +4691,7 @@
                 </a:solidFill>
                 <a:latin typeface="Arial"/>
               </a:rPr>
-              <a:t>1. TEİAŞ SFK ön yeterliliği</a:t>
+              <a:t>TEİAŞ, teşvik ve ornitoloji kalemleri olumlu sonuçlansa bile E[NPV] &lt; 0: bilgi değerleri sıfır.</a:t>
             </a:r>
           </a:p>
           <a:p>
@@ -4701,13 +4701,29 @@
               </a:spcAft>
             </a:pPr>
             <a:r>
+              <a:rPr sz="1300" b="1">
+                <a:solidFill>
+                  <a:srgbClr val="0B0B0B"/>
+                </a:solidFill>
+                <a:latin typeface="Arial"/>
+              </a:rPr>
+              <a:t>Yeniden değerlendirme tetikleyicileri</a:t>
+            </a:r>
+          </a:p>
+          <a:p>
+            <a:pPr algn="l">
+              <a:spcAft>
+                <a:spcPts val="585"/>
+              </a:spcAft>
+            </a:pPr>
+            <a:r>
               <a:rPr sz="1300" b="0">
                 <a:solidFill>
                   <a:srgbClr val="0B0B0B"/>
                 </a:solidFill>
                 <a:latin typeface="Arial"/>
               </a:rPr>
-              <a:t>2. Yatırım teşvik belgesi</a:t>
+              <a:t>1. YEKDEM koridoru endeksli teyit edilir (E[NPV] +0,4 M$)</a:t>
             </a:r>
           </a:p>
           <a:p>
@@ -4723,7 +4739,7 @@
                 </a:solidFill>
                 <a:latin typeface="Arial"/>
               </a:rPr>
-              <a:t>3. COD ≤ 31.12.2030 güvencesi (türbin slotu, cezalı EPC)</a:t>
+              <a:t>2. Uzun vadeli fiyat beklentisi ≳ 60 $/MWh</a:t>
             </a:r>
           </a:p>
           <a:p>
@@ -4739,7 +4755,7 @@
                 </a:solidFill>
                 <a:latin typeface="Arial"/>
               </a:rPr>
-              <a:t>4. YEKDEM endekslemesine hukuki görüş</a:t>
+              <a:t>3. Türbin + EPC maliyeti ≳ %2 düşer</a:t>
             </a:r>
           </a:p>
           <a:p>
@@ -4755,7 +4771,7 @@
                 </a:solidFill>
                 <a:latin typeface="Arial"/>
               </a:rPr>
-              <a:t>5. Ornitoloji yükümlülüklerinin maliyeti</a:t>
+              <a:t>4. 2027'de depolama &lt; ~1 GW, SFK fiyatı korunur</a:t>
             </a:r>
           </a:p>
           <a:p>
@@ -4771,7 +4787,7 @@
                 </a:solidFill>
                 <a:latin typeface="Arial"/>
               </a:rPr>
-              <a:t>6. Borç, SFK geliri olmadan boyutlanır</a:t>
+              <a:t>5. RES'lere sistem kesintisi 2027'de &lt; %5</a:t>
             </a:r>
           </a:p>
           <a:p>
@@ -4787,15 +4803,8 @@
                 </a:solidFill>
                 <a:latin typeface="Arial"/>
               </a:rPr>
-              <a:t>Vazgeç tetikleyicileri</a:t>
-            </a:r>
-          </a:p>
-          <a:p>
-            <a:pPr algn="l">
-              <a:spcAft>
-                <a:spcPts val="585"/>
-              </a:spcAft>
-            </a:pPr>
+              <a:t>Pencere: </a:t>
+            </a:r>
             <a:r>
               <a:rPr sz="1300" b="0">
                 <a:solidFill>
@@ -4803,32 +4812,7 @@
                 </a:solidFill>
                 <a:latin typeface="Arial"/>
               </a:rPr>
-              <a:t>Teşvik belgesi yok · fiyat beklentisi &lt; ~52 $/MWh · türbin teslimi &gt; 24 ay</a:t>
-            </a:r>
-          </a:p>
-          <a:p>
-            <a:pPr algn="l">
-              <a:spcAft>
-                <a:spcPts val="585"/>
-              </a:spcAft>
-            </a:pPr>
-            <a:r>
-              <a:rPr sz="1300" b="1">
-                <a:solidFill>
-                  <a:srgbClr val="0B0B0B"/>
-                </a:solidFill>
-                <a:latin typeface="Arial"/>
-              </a:rPr>
-              <a:t>Prim tavanı 3,1 M$'a çıkabilir: </a:t>
-            </a:r>
-            <a:r>
-              <a:rPr sz="1300" b="0">
-                <a:solidFill>
-                  <a:srgbClr val="0B0B0B"/>
-                </a:solidFill>
-                <a:latin typeface="Arial"/>
-              </a:rPr>
-              <a:t>YEKDEM koridoru endeksli teyit edilirse (komiteye dönülür).</a:t>
+              <a:t>tetikleyici 2027 ortasından sonra gelirse YEKDEM'e erişim riski artar.</a:t>
             </a:r>
           </a:p>
         </p:txBody>
@@ -5502,7 +5486,7 @@
                 </a:solidFill>
                 <a:latin typeface="Arial"/>
               </a:rPr>
-              <a:t>Değer pozitif ama ince: kesin yatırım değil, durum tespiti ve ≤ 1,5 M$ teklif</a:t>
+              <a:t>Değer marjinal olarak negatif (−1,7 M$): edinimi rafa kaldır, gözlenebilir tetikleyicileri izle</a:t>
             </a:r>
           </a:p>
         </p:txBody>
@@ -5683,7 +5667,7 @@
             <a:avLst/>
           </a:prstGeom>
           <a:solidFill>
-            <a:srgbClr val="2A78D6"/>
+            <a:srgbClr val="EB6834"/>
           </a:solidFill>
           <a:ln>
             <a:noFill/>
@@ -5785,7 +5769,7 @@
                 </a:solidFill>
                 <a:latin typeface="Arial"/>
               </a:rPr>
-              <a:t>+1,5 M$</a:t>
+              <a:t>−1,7 M$</a:t>
             </a:r>
           </a:p>
         </p:txBody>
@@ -5824,7 +5808,7 @@
                 </a:solidFill>
                 <a:latin typeface="Arial"/>
               </a:rPr>
-              <a:t>endeksli YEKDEM'de +3,1 M$</a:t>
+              <a:t>endeksli YEKDEM'de +0,4 M$</a:t>
             </a:r>
           </a:p>
         </p:txBody>
@@ -5990,7 +5974,7 @@
                 </a:solidFill>
                 <a:latin typeface="Arial"/>
               </a:rPr>
-              <a:t>%50</a:t>
+              <a:t>%42</a:t>
             </a:r>
           </a:p>
         </p:txBody>
@@ -6029,7 +6013,7 @@
                 </a:solidFill>
                 <a:latin typeface="Arial"/>
               </a:rPr>
-              <a:t>yarı yarıya</a:t>
+              <a:t>saf tüccarda %42</a:t>
             </a:r>
           </a:p>
         </p:txBody>
@@ -6195,7 +6179,7 @@
                 </a:solidFill>
                 <a:latin typeface="Arial"/>
               </a:rPr>
-              <a:t>−25,8 M$</a:t>
+              <a:t>−28,0 M$</a:t>
             </a:r>
           </a:p>
         </p:txBody>
@@ -6298,7 +6282,7 @@
             <a:avLst/>
           </a:prstGeom>
           <a:solidFill>
-            <a:srgbClr val="1BAF7A"/>
+            <a:srgbClr val="2A78D6"/>
           </a:solidFill>
           <a:ln>
             <a:noFill/>
@@ -6361,7 +6345,7 @@
                 </a:solidFill>
                 <a:latin typeface="Arial"/>
               </a:rPr>
-              <a:t>Azami edinim primi</a:t>
+              <a:t>Başabaş beklenen fiyat</a:t>
             </a:r>
           </a:p>
         </p:txBody>
@@ -6400,7 +6384,7 @@
                 </a:solidFill>
                 <a:latin typeface="Arial"/>
               </a:rPr>
-              <a:t>1,5 M$</a:t>
+              <a:t>≈ 59 $/MWh</a:t>
             </a:r>
           </a:p>
         </p:txBody>
@@ -6439,7 +6423,7 @@
                 </a:solidFill>
                 <a:latin typeface="Arial"/>
               </a:rPr>
-              <a:t>durum tespiti tavanı 1,0 M$</a:t>
+              <a:t>baz varsayım 58 $/MWh</a:t>
             </a:r>
           </a:p>
         </p:txBody>
@@ -6537,7 +6521,7 @@
                 </a:solidFill>
                 <a:latin typeface="Arial"/>
               </a:rPr>
-              <a:t>Her yıl seçilebilen opsiyon olarak değerli; 10 yıl kilitlemek E[NPV]'yi −10,9 M$'a düşürüyor.</a:t>
+              <a:t>Her yıl seçilebilen opsiyon olarak değerli; 10 yıl kilitlemek E[NPV]'yi −12,2 M$'a düşürüyor.</a:t>
             </a:r>
           </a:p>
           <a:p>
@@ -6553,7 +6537,7 @@
                 </a:solidFill>
                 <a:latin typeface="Arial"/>
               </a:rPr>
-              <a:t>Durum tespiti değeri ölçülebilir. </a:t>
+              <a:t>Önceki +1,5 M$ bir tutarsızlıktı. </a:t>
             </a:r>
             <a:r>
               <a:rPr sz="1500" b="0">
@@ -6562,7 +6546,32 @@
                 </a:solidFill>
                 <a:latin typeface="Arial"/>
               </a:rPr>
-              <a:t>TEİAŞ SFK görüşü, teşvik belgesi ve ornitoloji kalemlerinin bilgi değeri toplamı 1,04 M$.</a:t>
+              <a:t>Monte Carlo'da 58 fiyatın medyanıydı; ortalama 61,8'e çıkıyordu. Düzeltilince −1,7 M$.</a:t>
+            </a:r>
+          </a:p>
+          <a:p>
+            <a:pPr algn="l">
+              <a:spcAft>
+                <a:spcPts val="675"/>
+              </a:spcAft>
+            </a:pPr>
+            <a:r>
+              <a:rPr sz="1500" b="1">
+                <a:solidFill>
+                  <a:srgbClr val="0B0B0B"/>
+                </a:solidFill>
+                <a:latin typeface="Arial"/>
+              </a:rPr>
+              <a:t>Durum tespitinin bilgi değeri sıfır. </a:t>
+            </a:r>
+            <a:r>
+              <a:rPr sz="1500" b="0">
+                <a:solidFill>
+                  <a:srgbClr val="0B0B0B"/>
+                </a:solidFill>
+                <a:latin typeface="Arial"/>
+              </a:rPr>
+              <a:t>Olumlu sonuçlar bile E[NPV]'yi pozitife çevirmiyor; tek istisna YEKDEM endekslemesi.</a:t>
             </a:r>
           </a:p>
         </p:txBody>
@@ -9170,7 +9179,7 @@
                 </a:solidFill>
                 <a:latin typeface="Arial"/>
               </a:rPr>
-              <a:t>YEKDEM'i her yıl seçilebilen bir taban olarak kullanmak en iyi yapı; 10 yıl kilitlemek değeri yok ediyor</a:t>
+              <a:t>YEKDEM'i her yıl seçilebilen bir taban olarak kullanmak en iyi yapı, ama nominal koridorda değer yine negatif</a:t>
             </a:r>
           </a:p>
         </p:txBody>
@@ -9550,8 +9559,8 @@
         </p:blipFill>
         <p:spPr>
           <a:xfrm>
-            <a:off x="550906" y="1920240"/>
-            <a:ext cx="11089882" cy="4434840"/>
+            <a:off x="673371" y="1920240"/>
+            <a:ext cx="10844952" cy="4434840"/>
           </a:xfrm>
           <a:prstGeom prst="rect">
             <a:avLst/>

--- a/outputs/08/Sunum.pptx
+++ b/outputs/08/Sunum.pptx
@@ -5006,7 +5006,7 @@
         </p:nvGraphicFramePr>
         <p:xfrm>
           <a:off x="502920" y="1600200"/>
-          <a:ext cx="11185855" cy="4480560"/>
+          <a:ext cx="11185855" cy="3840480"/>
         </p:xfrm>
         <a:graphic>
           <a:graphicData uri="http://schemas.openxmlformats.org/drawingml/2006/table">
@@ -5018,14 +5018,14 @@
                 <a:gridCol w="2377440"/>
                 <a:gridCol w="8808415"/>
               </a:tblGrid>
-              <a:tr h="560070">
+              <a:tr h="480060">
                 <a:tc>
                   <a:txBody>
                     <a:bodyPr/>
                     <a:lstStyle/>
                     <a:p>
                       <a:r>
-                        <a:rPr sz="1250" b="1">
+                        <a:rPr sz="1150" b="1">
                           <a:solidFill>
                             <a:srgbClr val="0B0B0B"/>
                           </a:solidFill>
@@ -5047,7 +5047,7 @@
                     <a:lstStyle/>
                     <a:p>
                       <a:r>
-                        <a:rPr sz="1250" b="0">
+                        <a:rPr sz="1150" b="0">
                           <a:solidFill>
                             <a:srgbClr val="0B0B0B"/>
                           </a:solidFill>
@@ -5064,14 +5064,14 @@
                   </a:tcPr>
                 </a:tc>
               </a:tr>
-              <a:tr h="560070">
+              <a:tr h="480060">
                 <a:tc>
                   <a:txBody>
                     <a:bodyPr/>
                     <a:lstStyle/>
                     <a:p>
                       <a:r>
-                        <a:rPr sz="1250" b="1">
+                        <a:rPr sz="1150" b="1">
                           <a:solidFill>
                             <a:srgbClr val="0B0B0B"/>
                           </a:solidFill>
@@ -5093,7 +5093,7 @@
                     <a:lstStyle/>
                     <a:p>
                       <a:r>
-                        <a:rPr sz="1250" b="0">
+                        <a:rPr sz="1150" b="0">
                           <a:solidFill>
                             <a:srgbClr val="0B0B0B"/>
                           </a:solidFill>
@@ -5110,14 +5110,14 @@
                   </a:tcPr>
                 </a:tc>
               </a:tr>
-              <a:tr h="560070">
+              <a:tr h="480060">
                 <a:tc>
                   <a:txBody>
                     <a:bodyPr/>
                     <a:lstStyle/>
                     <a:p>
                       <a:r>
-                        <a:rPr sz="1250" b="1">
+                        <a:rPr sz="1150" b="1">
                           <a:solidFill>
                             <a:srgbClr val="0B0B0B"/>
                           </a:solidFill>
@@ -5139,13 +5139,13 @@
                     <a:lstStyle/>
                     <a:p>
                       <a:r>
-                        <a:rPr sz="1250" b="0">
+                        <a:rPr sz="1150" b="0">
                           <a:solidFill>
                             <a:srgbClr val="0B0B0B"/>
                           </a:solidFill>
                           <a:latin typeface="Arial"/>
                         </a:rPr>
-                        <a:t>Baz 58 $/MWh reel; AR(1) fiyat yolları; 2 gün içi şekil yılı × 10 hava yılı</a:t>
+                        <a:t>Beklenen 58 $/MWh reel (log-AR(1), ortalaması 58'e ayarlı; kriz olayları ayrı); 2 şekil yılı × 10 hava yılı</a:t>
                       </a:r>
                     </a:p>
                   </a:txBody>
@@ -5156,14 +5156,14 @@
                   </a:tcPr>
                 </a:tc>
               </a:tr>
-              <a:tr h="560070">
+              <a:tr h="480060">
                 <a:tc>
                   <a:txBody>
                     <a:bodyPr/>
                     <a:lstStyle/>
                     <a:p>
                       <a:r>
-                        <a:rPr sz="1250" b="1">
+                        <a:rPr sz="1150" b="1">
                           <a:solidFill>
                             <a:srgbClr val="0B0B0B"/>
                           </a:solidFill>
@@ -5185,7 +5185,7 @@
                     <a:lstStyle/>
                     <a:p>
                       <a:r>
-                        <a:rPr sz="1250" b="0">
+                        <a:rPr sz="1150" b="0">
                           <a:solidFill>
                             <a:srgbClr val="0B0B0B"/>
                           </a:solidFill>
@@ -5202,14 +5202,14 @@
                   </a:tcPr>
                 </a:tc>
               </a:tr>
-              <a:tr h="560070">
+              <a:tr h="480060">
                 <a:tc>
                   <a:txBody>
                     <a:bodyPr/>
                     <a:lstStyle/>
                     <a:p>
                       <a:r>
-                        <a:rPr sz="1250" b="1">
+                        <a:rPr sz="1150" b="1">
                           <a:solidFill>
                             <a:srgbClr val="0B0B0B"/>
                           </a:solidFill>
@@ -5231,7 +5231,7 @@
                     <a:lstStyle/>
                     <a:p>
                       <a:r>
-                        <a:rPr sz="1250" b="0">
+                        <a:rPr sz="1150" b="0">
                           <a:solidFill>
                             <a:srgbClr val="0B0B0B"/>
                           </a:solidFill>
@@ -5248,14 +5248,14 @@
                   </a:tcPr>
                 </a:tc>
               </a:tr>
-              <a:tr h="560070">
+              <a:tr h="480060">
                 <a:tc>
                   <a:txBody>
                     <a:bodyPr/>
                     <a:lstStyle/>
                     <a:p>
                       <a:r>
-                        <a:rPr sz="1250" b="1">
+                        <a:rPr sz="1150" b="1">
                           <a:solidFill>
                             <a:srgbClr val="0B0B0B"/>
                           </a:solidFill>
@@ -5277,7 +5277,7 @@
                     <a:lstStyle/>
                     <a:p>
                       <a:r>
-                        <a:rPr sz="1250" b="0">
+                        <a:rPr sz="1150" b="0">
                           <a:solidFill>
                             <a:srgbClr val="0B0B0B"/>
                           </a:solidFill>
@@ -5294,14 +5294,14 @@
                   </a:tcPr>
                 </a:tc>
               </a:tr>
-              <a:tr h="560070">
+              <a:tr h="480060">
                 <a:tc>
                   <a:txBody>
                     <a:bodyPr/>
                     <a:lstStyle/>
                     <a:p>
                       <a:r>
-                        <a:rPr sz="1250" b="1">
+                        <a:rPr sz="1150" b="1">
                           <a:solidFill>
                             <a:srgbClr val="0B0B0B"/>
                           </a:solidFill>
@@ -5323,7 +5323,7 @@
                     <a:lstStyle/>
                     <a:p>
                       <a:r>
-                        <a:rPr sz="1250" b="0">
+                        <a:rPr sz="1150" b="0">
                           <a:solidFill>
                             <a:srgbClr val="0B0B0B"/>
                           </a:solidFill>
@@ -5340,14 +5340,14 @@
                   </a:tcPr>
                 </a:tc>
               </a:tr>
-              <a:tr h="560070">
+              <a:tr h="480060">
                 <a:tc>
                   <a:txBody>
                     <a:bodyPr/>
                     <a:lstStyle/>
                     <a:p>
                       <a:r>
-                        <a:rPr sz="1250" b="1">
+                        <a:rPr sz="1150" b="1">
                           <a:solidFill>
                             <a:srgbClr val="0B0B0B"/>
                           </a:solidFill>
@@ -5369,13 +5369,13 @@
                     <a:lstStyle/>
                     <a:p>
                       <a:r>
-                        <a:rPr sz="1250" b="0">
+                        <a:rPr sz="1150" b="0">
                           <a:solidFill>
                             <a:srgbClr val="0B0B0B"/>
                           </a:solidFill>
                           <a:latin typeface="Arial"/>
                         </a:rPr>
-                        <a:t>Excel modeli 48 senaryoda Python ile birebir; 0 formül hatası; 18 birim testi</a:t>
+                        <a:t>Excel–Python 48/48 mutabık; deterministik–Monte Carlo köprüsü; 18 test + CI (ruff); docs/MODEL_DOGRULAMA.md</a:t>
                       </a:r>
                     </a:p>
                   </a:txBody>
@@ -5390,6 +5390,61 @@
           </a:graphicData>
         </a:graphic>
       </p:graphicFrame>
+      <p:sp>
+        <p:nvSpPr>
+          <p:cNvPr id="7" name="TextBox 6"/>
+          <p:cNvSpPr txBox="1"/>
+          <p:nvPr/>
+        </p:nvSpPr>
+        <p:spPr>
+          <a:xfrm>
+            <a:off x="502920" y="5669280"/>
+            <a:ext cx="11185855" cy="685800"/>
+          </a:xfrm>
+          <a:prstGeom prst="rect">
+            <a:avLst/>
+          </a:prstGeom>
+          <a:noFill/>
+        </p:spPr>
+        <p:txBody>
+          <a:bodyPr wrap="square" anchor="t" lIns="0" rIns="0" tIns="0" bIns="0">
+            <a:spAutoFit/>
+          </a:bodyPr>
+          <a:lstStyle/>
+          <a:p>
+            <a:pPr algn="l">
+              <a:spcAft>
+                <a:spcPts val="382"/>
+              </a:spcAft>
+            </a:pPr>
+            <a:r>
+              <a:rPr sz="850" b="0">
+                <a:solidFill>
+                  <a:srgbClr val="52514E"/>
+                </a:solidFill>
+                <a:latin typeface="Arial"/>
+              </a:rPr>
+              <a:t>Veri atıfları — ERA5: Contains modified Copernicus Climate Change Service information 2026. Neither the European Commission nor ECMWF is responsible for any use that may be made of the Copernicus information or data it contains.</a:t>
+            </a:r>
+          </a:p>
+          <a:p>
+            <a:pPr algn="l">
+              <a:spcAft>
+                <a:spcPts val="382"/>
+              </a:spcAft>
+            </a:pPr>
+            <a:r>
+              <a:rPr sz="850" b="0">
+                <a:solidFill>
+                  <a:srgbClr val="52514E"/>
+                </a:solidFill>
+                <a:latin typeface="Arial"/>
+              </a:rPr>
+              <a:t>PVGIS: PVGIS © European Communities, 2001-2026 (PVGIS-SARAH3). EPİAŞ: Kaynak: EPİAŞ Şeffaflık Platformu (seffaflik.epias.com.tr). Kod MIT; veriler kaynaklarının koşullarına tabi (DATA_SOURCES.md).</a:t>
+            </a:r>
+          </a:p>
+        </p:txBody>
+      </p:sp>
     </p:spTree>
   </p:cSld>
   <p:clrMapOvr>
